--- a/CACF/_документы/Презентация ЦАКФ – о Фонде.pptx
+++ b/CACF/_документы/Презентация ЦАКФ – о Фонде.pptx
@@ -4200,7 +4200,7 @@
         <p:spPr>
           <a:xfrm>
             <a:off x="827999" y="1548000"/>
-            <a:ext cx="5976000" cy="936000"/>
+            <a:ext cx="5148000" cy="936000"/>
           </a:xfrm>
           <a:prstGeom prst="rect">
             <a:avLst/>
@@ -4215,7 +4215,7 @@
           <a:p>
             <a:pPr algn="l"/>
             <a:r>
-              <a:rPr sz="1400" b="1">
+              <a:rPr sz="1300" b="1">
                 <a:solidFill>
                   <a:srgbClr val="1C3E6D"/>
                 </a:solidFill>
@@ -4224,7 +4224,7 @@
               <a:t>Создан 22 февраля 2024 года </a:t>
             </a:r>
             <a:r>
-              <a:rPr sz="1400" b="0">
+              <a:rPr sz="1300" b="0">
                 <a:solidFill>
                   <a:srgbClr val="404040"/>
                 </a:solidFill>
@@ -4243,7 +4243,7 @@
         </p:nvSpPr>
         <p:spPr>
           <a:xfrm>
-            <a:off x="288000" y="2682000"/>
+            <a:off x="288000" y="2520000"/>
             <a:ext cx="396000" cy="306000"/>
           </a:xfrm>
           <a:prstGeom prst="roundRect">
@@ -4289,7 +4289,7 @@
         </p:nvSpPr>
         <p:spPr>
           <a:xfrm>
-            <a:off x="288000" y="2682000"/>
+            <a:off x="288000" y="2520000"/>
             <a:ext cx="396000" cy="306000"/>
           </a:xfrm>
           <a:prstGeom prst="rect">
@@ -4324,8 +4324,8 @@
         </p:nvSpPr>
         <p:spPr>
           <a:xfrm>
-            <a:off x="827999" y="2646000"/>
-            <a:ext cx="5976000" cy="936000"/>
+            <a:off x="827999" y="2484000"/>
+            <a:ext cx="5148000" cy="936000"/>
           </a:xfrm>
           <a:prstGeom prst="rect">
             <a:avLst/>
@@ -4340,22 +4340,22 @@
           <a:p>
             <a:pPr algn="l"/>
             <a:r>
-              <a:rPr sz="1400" b="1">
+              <a:rPr sz="1300" b="1">
                 <a:solidFill>
                   <a:srgbClr val="1C3E6D"/>
                 </a:solidFill>
                 <a:latin typeface="Manrope"/>
               </a:rPr>
-              <a:t>Юридическая форма Проектного офиса для Центральной Азии </a:t>
-            </a:r>
-            <a:r>
-              <a:rPr sz="1400" b="0">
+              <a:t>Юридическая форма </a:t>
+            </a:r>
+            <a:r>
+              <a:rPr sz="1300" b="0">
                 <a:solidFill>
                   <a:srgbClr val="404040"/>
                 </a:solidFill>
                 <a:latin typeface="Manrope"/>
               </a:rPr>
-              <a:t>по изменению климата и зелёной энергетике.</a:t>
+              <a:t>Проектного офиса для Центральной Азии по изменению климата и зелёной энергетике и Проектного офиса «Таза Қазақстан».</a:t>
             </a:r>
           </a:p>
         </p:txBody>
@@ -4368,7 +4368,7 @@
         </p:nvSpPr>
         <p:spPr>
           <a:xfrm>
-            <a:off x="288000" y="3780000"/>
+            <a:off x="288000" y="3456000"/>
             <a:ext cx="396000" cy="306000"/>
           </a:xfrm>
           <a:prstGeom prst="roundRect">
@@ -4414,7 +4414,7 @@
         </p:nvSpPr>
         <p:spPr>
           <a:xfrm>
-            <a:off x="288000" y="3780000"/>
+            <a:off x="288000" y="3456000"/>
             <a:ext cx="396000" cy="306000"/>
           </a:xfrm>
           <a:prstGeom prst="rect">
@@ -4449,8 +4449,8 @@
         </p:nvSpPr>
         <p:spPr>
           <a:xfrm>
-            <a:off x="827999" y="3744000"/>
-            <a:ext cx="5976000" cy="936000"/>
+            <a:off x="827999" y="3420000"/>
+            <a:ext cx="5148000" cy="936000"/>
           </a:xfrm>
           <a:prstGeom prst="rect">
             <a:avLst/>
@@ -4465,7 +4465,7 @@
           <a:p>
             <a:pPr algn="l"/>
             <a:r>
-              <a:rPr sz="1400" b="1">
+              <a:rPr sz="1300" b="1">
                 <a:solidFill>
                   <a:srgbClr val="1C3E6D"/>
                 </a:solidFill>
@@ -4474,7 +4474,7 @@
               <a:t>Самостоятельная международная организация </a:t>
             </a:r>
             <a:r>
-              <a:rPr sz="1400" b="0">
+              <a:rPr sz="1300" b="0">
                 <a:solidFill>
                   <a:srgbClr val="404040"/>
                 </a:solidFill>
@@ -4493,7 +4493,7 @@
         </p:nvSpPr>
         <p:spPr>
           <a:xfrm>
-            <a:off x="288000" y="4878000"/>
+            <a:off x="288000" y="4392000"/>
             <a:ext cx="396000" cy="306000"/>
           </a:xfrm>
           <a:prstGeom prst="roundRect">
@@ -4539,7 +4539,7 @@
         </p:nvSpPr>
         <p:spPr>
           <a:xfrm>
-            <a:off x="288000" y="4878000"/>
+            <a:off x="288000" y="4392000"/>
             <a:ext cx="396000" cy="306000"/>
           </a:xfrm>
           <a:prstGeom prst="rect">
@@ -4574,8 +4574,8 @@
         </p:nvSpPr>
         <p:spPr>
           <a:xfrm>
-            <a:off x="827999" y="4842000"/>
-            <a:ext cx="5976000" cy="936000"/>
+            <a:off x="827999" y="4356000"/>
+            <a:ext cx="5148000" cy="936000"/>
           </a:xfrm>
           <a:prstGeom prst="rect">
             <a:avLst/>
@@ -4590,7 +4590,7 @@
           <a:p>
             <a:pPr algn="l"/>
             <a:r>
-              <a:rPr sz="1400" b="1">
+              <a:rPr sz="1300" b="1">
                 <a:solidFill>
                   <a:srgbClr val="1C3E6D"/>
                 </a:solidFill>
@@ -4599,7 +4599,7 @@
               <a:t>Региональные проекты </a:t>
             </a:r>
             <a:r>
-              <a:rPr sz="1400" b="0">
+              <a:rPr sz="1300" b="0">
                 <a:solidFill>
                   <a:srgbClr val="404040"/>
                 </a:solidFill>
@@ -4612,14 +4612,154 @@
       </p:sp>
       <p:sp>
         <p:nvSpPr>
-          <p:cNvPr id="55" name="Rounded Rectangle 54"/>
+          <p:cNvPr id="55" name="TextBox 54"/>
+          <p:cNvSpPr txBox="1"/>
+          <p:nvPr/>
+        </p:nvSpPr>
+        <p:spPr>
+          <a:xfrm>
+            <a:off x="288000" y="5616000"/>
+            <a:ext cx="2448000" cy="324000"/>
+          </a:xfrm>
+          <a:prstGeom prst="rect">
+            <a:avLst/>
+          </a:prstGeom>
+          <a:noFill/>
+        </p:spPr>
+        <p:txBody>
+          <a:bodyPr wrap="square" anchor="t" lIns="36000" rIns="36000" tIns="18000" bIns="18000">
+            <a:spAutoFit/>
+          </a:bodyPr>
+          <a:lstStyle/>
+          <a:p>
+            <a:pPr algn="l"/>
+            <a:r>
+              <a:rPr sz="1800" b="1">
+                <a:solidFill>
+                  <a:srgbClr val="3B7D48"/>
+                </a:solidFill>
+                <a:latin typeface="Manrope"/>
+              </a:rPr>
+              <a:t>2024</a:t>
+            </a:r>
+          </a:p>
+        </p:txBody>
+      </p:sp>
+      <p:sp>
+        <p:nvSpPr>
+          <p:cNvPr id="56" name="TextBox 55"/>
+          <p:cNvSpPr txBox="1"/>
+          <p:nvPr/>
+        </p:nvSpPr>
+        <p:spPr>
+          <a:xfrm>
+            <a:off x="288000" y="5903999"/>
+            <a:ext cx="2448000" cy="288000"/>
+          </a:xfrm>
+          <a:prstGeom prst="rect">
+            <a:avLst/>
+          </a:prstGeom>
+          <a:noFill/>
+        </p:spPr>
+        <p:txBody>
+          <a:bodyPr wrap="square" anchor="t" lIns="36000" rIns="36000" tIns="18000" bIns="18000">
+            <a:spAutoFit/>
+          </a:bodyPr>
+          <a:lstStyle/>
+          <a:p>
+            <a:pPr algn="l"/>
+            <a:r>
+              <a:rPr sz="1100" b="0">
+                <a:solidFill>
+                  <a:srgbClr val="404040"/>
+                </a:solidFill>
+                <a:latin typeface="Manrope"/>
+              </a:rPr>
+              <a:t>регистрация в МФЦА</a:t>
+            </a:r>
+          </a:p>
+        </p:txBody>
+      </p:sp>
+      <p:sp>
+        <p:nvSpPr>
+          <p:cNvPr id="57" name="TextBox 56"/>
+          <p:cNvSpPr txBox="1"/>
+          <p:nvPr/>
+        </p:nvSpPr>
+        <p:spPr>
+          <a:xfrm>
+            <a:off x="2880000" y="5616000"/>
+            <a:ext cx="2448000" cy="324000"/>
+          </a:xfrm>
+          <a:prstGeom prst="rect">
+            <a:avLst/>
+          </a:prstGeom>
+          <a:noFill/>
+        </p:spPr>
+        <p:txBody>
+          <a:bodyPr wrap="square" anchor="t" lIns="36000" rIns="36000" tIns="18000" bIns="18000">
+            <a:spAutoFit/>
+          </a:bodyPr>
+          <a:lstStyle/>
+          <a:p>
+            <a:pPr algn="l"/>
+            <a:r>
+              <a:rPr sz="1800" b="1">
+                <a:solidFill>
+                  <a:srgbClr val="156082"/>
+                </a:solidFill>
+                <a:latin typeface="Manrope"/>
+              </a:rPr>
+              <a:t>2025</a:t>
+            </a:r>
+          </a:p>
+        </p:txBody>
+      </p:sp>
+      <p:sp>
+        <p:nvSpPr>
+          <p:cNvPr id="58" name="TextBox 57"/>
+          <p:cNvSpPr txBox="1"/>
+          <p:nvPr/>
+        </p:nvSpPr>
+        <p:spPr>
+          <a:xfrm>
+            <a:off x="2880000" y="5903999"/>
+            <a:ext cx="2448000" cy="288000"/>
+          </a:xfrm>
+          <a:prstGeom prst="rect">
+            <a:avLst/>
+          </a:prstGeom>
+          <a:noFill/>
+        </p:spPr>
+        <p:txBody>
+          <a:bodyPr wrap="square" anchor="t" lIns="36000" rIns="36000" tIns="18000" bIns="18000">
+            <a:spAutoFit/>
+          </a:bodyPr>
+          <a:lstStyle/>
+          <a:p>
+            <a:pPr algn="l"/>
+            <a:r>
+              <a:rPr sz="1100" b="0">
+                <a:solidFill>
+                  <a:srgbClr val="404040"/>
+                </a:solidFill>
+                <a:latin typeface="Manrope"/>
+              </a:rPr>
+              <a:t>положительное аудиторское заключение</a:t>
+            </a:r>
+          </a:p>
+        </p:txBody>
+      </p:sp>
+      <p:sp>
+        <p:nvSpPr>
+          <p:cNvPr id="59" name="Rounded Rectangle 58"/>
           <p:cNvSpPr/>
           <p:nvPr/>
         </p:nvSpPr>
         <p:spPr>
           <a:xfrm>
-            <a:off x="7128000" y="1584000"/>
-            <a:ext cx="4788000" cy="2736000"/>
+            <a:off x="6263999" y="1548000"/>
+            <a:ext cx="5652000" cy="1134000"/>
           </a:xfrm>
           <a:prstGeom prst="roundRect">
             <a:avLst>
@@ -4658,14 +4798,14 @@
       </p:sp>
       <p:sp>
         <p:nvSpPr>
-          <p:cNvPr id="56" name="Rectangle 55"/>
+          <p:cNvPr id="60" name="Rectangle 59"/>
           <p:cNvSpPr/>
           <p:nvPr/>
         </p:nvSpPr>
         <p:spPr>
           <a:xfrm>
-            <a:off x="7128000" y="1584000"/>
-            <a:ext cx="43200" cy="2736000"/>
+            <a:off x="6263999" y="1548000"/>
+            <a:ext cx="43200" cy="1134000"/>
           </a:xfrm>
           <a:prstGeom prst="rect">
             <a:avLst/>
@@ -4702,14 +4842,14 @@
       </p:sp>
       <p:sp>
         <p:nvSpPr>
-          <p:cNvPr id="57" name="TextBox 56"/>
+          <p:cNvPr id="61" name="TextBox 60"/>
           <p:cNvSpPr txBox="1"/>
           <p:nvPr/>
         </p:nvSpPr>
         <p:spPr>
           <a:xfrm>
-            <a:off x="7343999" y="1692000"/>
-            <a:ext cx="4464000" cy="1872000"/>
+            <a:off x="6426000" y="1620000"/>
+            <a:ext cx="5400000" cy="251999"/>
           </a:xfrm>
           <a:prstGeom prst="rect">
             <a:avLst/>
@@ -4724,27 +4864,27 @@
           <a:p>
             <a:pPr algn="l"/>
             <a:r>
-              <a:rPr sz="1500" b="0">
-                <a:solidFill>
-                  <a:srgbClr val="1C3E6D"/>
-                </a:solidFill>
-                <a:latin typeface="Manrope"/>
-              </a:rPr>
-              <a:t>«Инициатива Казахстана по открытию Проектного офиса для Центральной Азии по изменению климата и зелёной энергетики может способствовать решению этих вопросов…»</a:t>
-            </a:r>
-          </a:p>
-        </p:txBody>
-      </p:sp>
-      <p:sp>
-        <p:nvSpPr>
-          <p:cNvPr id="58" name="TextBox 57"/>
+              <a:rPr sz="1150" b="1">
+                <a:solidFill>
+                  <a:srgbClr val="3B7D48"/>
+                </a:solidFill>
+                <a:latin typeface="Manrope"/>
+              </a:rPr>
+              <a:t>Президент Республики Казахстан</a:t>
+            </a:r>
+          </a:p>
+        </p:txBody>
+      </p:sp>
+      <p:sp>
+        <p:nvSpPr>
+          <p:cNvPr id="62" name="TextBox 61"/>
           <p:cNvSpPr txBox="1"/>
           <p:nvPr/>
         </p:nvSpPr>
         <p:spPr>
           <a:xfrm>
-            <a:off x="7343999" y="3636000"/>
-            <a:ext cx="4464000" cy="612000"/>
+            <a:off x="6426000" y="1853999"/>
+            <a:ext cx="5400000" cy="774000"/>
           </a:xfrm>
           <a:prstGeom prst="rect">
             <a:avLst/>
@@ -4757,41 +4897,139 @@
           </a:bodyPr>
           <a:lstStyle/>
           <a:p>
-            <a:pPr algn="l"/>
-            <a:r>
-              <a:rPr sz="1150" b="1">
-                <a:solidFill>
-                  <a:srgbClr val="3B7D48"/>
-                </a:solidFill>
-                <a:latin typeface="Manrope"/>
-              </a:rPr>
-              <a:t>Президент Республики Казахстан К.-Ж. Токаев</a:t>
-            </a:r>
-          </a:p>
-          <a:p>
-            <a:pPr algn="l"/>
+            <a:pPr algn="l">
+              <a:spcAft>
+                <a:spcPts val="200"/>
+              </a:spcAft>
+            </a:pPr>
             <a:r>
               <a:rPr sz="1150" b="0">
                 <a:solidFill>
+                  <a:srgbClr val="1C3E6D"/>
+                </a:solidFill>
+                <a:latin typeface="Manrope"/>
+              </a:rPr>
+              <a:t>«Инициатива Казахстана по открытию Проектного офиса для Центральной Азии по изменению климата и зелёной энергетики может способствовать решению этих вопросов…»</a:t>
+            </a:r>
+          </a:p>
+          <a:p>
+            <a:pPr algn="l">
+              <a:spcAft>
+                <a:spcPts val="200"/>
+              </a:spcAft>
+            </a:pPr>
+            <a:r>
+              <a:rPr sz="1150" b="0">
+                <a:solidFill>
                   <a:srgbClr val="404040"/>
                 </a:solidFill>
                 <a:latin typeface="Manrope"/>
               </a:rPr>
-              <a:t>78-я сессия Генеральной Ассамблеи ООН, Нью-Йорк, 2023</a:t>
-            </a:r>
-          </a:p>
-        </p:txBody>
-      </p:sp>
-      <p:sp>
-        <p:nvSpPr>
-          <p:cNvPr id="59" name="TextBox 58"/>
+              <a:t>78-я сессия Генеральной Ассамблеи ООН, Нью-Йорк, 2023 год</a:t>
+            </a:r>
+          </a:p>
+        </p:txBody>
+      </p:sp>
+      <p:sp>
+        <p:nvSpPr>
+          <p:cNvPr id="63" name="Rounded Rectangle 62"/>
+          <p:cNvSpPr/>
+          <p:nvPr/>
+        </p:nvSpPr>
+        <p:spPr>
+          <a:xfrm>
+            <a:off x="6263999" y="2754000"/>
+            <a:ext cx="5652000" cy="1026000"/>
+          </a:xfrm>
+          <a:prstGeom prst="roundRect">
+            <a:avLst>
+              <a:gd name="adj" fmla="val 8000"/>
+            </a:avLst>
+          </a:prstGeom>
+          <a:solidFill>
+            <a:srgbClr val="ECF4F8"/>
+          </a:solidFill>
+          <a:ln>
+            <a:noFill/>
+          </a:ln>
+          <a:effectLst/>
+        </p:spPr>
+        <p:style>
+          <a:lnRef idx="1">
+            <a:schemeClr val="accent1"/>
+          </a:lnRef>
+          <a:fillRef idx="3">
+            <a:schemeClr val="accent1"/>
+          </a:fillRef>
+          <a:effectRef idx="2">
+            <a:schemeClr val="accent1"/>
+          </a:effectRef>
+          <a:fontRef idx="minor">
+            <a:schemeClr val="lt1"/>
+          </a:fontRef>
+        </p:style>
+        <p:txBody>
+          <a:bodyPr rtlCol="0" anchor="ctr"/>
+          <a:lstStyle/>
+          <a:p>
+            <a:pPr algn="ctr"/>
+          </a:p>
+        </p:txBody>
+      </p:sp>
+      <p:sp>
+        <p:nvSpPr>
+          <p:cNvPr id="64" name="Rectangle 63"/>
+          <p:cNvSpPr/>
+          <p:nvPr/>
+        </p:nvSpPr>
+        <p:spPr>
+          <a:xfrm>
+            <a:off x="6263999" y="2754000"/>
+            <a:ext cx="43200" cy="1026000"/>
+          </a:xfrm>
+          <a:prstGeom prst="rect">
+            <a:avLst/>
+          </a:prstGeom>
+          <a:solidFill>
+            <a:srgbClr val="156082"/>
+          </a:solidFill>
+          <a:ln>
+            <a:noFill/>
+          </a:ln>
+          <a:effectLst/>
+        </p:spPr>
+        <p:style>
+          <a:lnRef idx="1">
+            <a:schemeClr val="accent1"/>
+          </a:lnRef>
+          <a:fillRef idx="3">
+            <a:schemeClr val="accent1"/>
+          </a:fillRef>
+          <a:effectRef idx="2">
+            <a:schemeClr val="accent1"/>
+          </a:effectRef>
+          <a:fontRef idx="minor">
+            <a:schemeClr val="lt1"/>
+          </a:fontRef>
+        </p:style>
+        <p:txBody>
+          <a:bodyPr rtlCol="0" anchor="ctr"/>
+          <a:lstStyle/>
+          <a:p>
+            <a:pPr algn="ctr"/>
+          </a:p>
+        </p:txBody>
+      </p:sp>
+      <p:sp>
+        <p:nvSpPr>
+          <p:cNvPr id="65" name="TextBox 64"/>
           <p:cNvSpPr txBox="1"/>
           <p:nvPr/>
         </p:nvSpPr>
         <p:spPr>
           <a:xfrm>
-            <a:off x="7128000" y="4536000"/>
-            <a:ext cx="2232000" cy="396000"/>
+            <a:off x="6426000" y="2826000"/>
+            <a:ext cx="5400000" cy="251999"/>
           </a:xfrm>
           <a:prstGeom prst="rect">
             <a:avLst/>
@@ -4806,27 +5044,27 @@
           <a:p>
             <a:pPr algn="l"/>
             <a:r>
-              <a:rPr sz="2200" b="1">
-                <a:solidFill>
-                  <a:srgbClr val="3B7D48"/>
-                </a:solidFill>
-                <a:latin typeface="Manrope"/>
-              </a:rPr>
-              <a:t>2024</a:t>
-            </a:r>
-          </a:p>
-        </p:txBody>
-      </p:sp>
-      <p:sp>
-        <p:nvSpPr>
-          <p:cNvPr id="60" name="TextBox 59"/>
+              <a:rPr sz="1150" b="1">
+                <a:solidFill>
+                  <a:srgbClr val="156082"/>
+                </a:solidFill>
+                <a:latin typeface="Manrope"/>
+              </a:rPr>
+              <a:t>Декларация глав государств Центральной Азии, п. 24</a:t>
+            </a:r>
+          </a:p>
+        </p:txBody>
+      </p:sp>
+      <p:sp>
+        <p:nvSpPr>
+          <p:cNvPr id="66" name="TextBox 65"/>
           <p:cNvSpPr txBox="1"/>
           <p:nvPr/>
         </p:nvSpPr>
         <p:spPr>
           <a:xfrm>
-            <a:off x="7128000" y="4932000"/>
-            <a:ext cx="2232000" cy="468000"/>
+            <a:off x="6426000" y="3060000"/>
+            <a:ext cx="5400000" cy="666000"/>
           </a:xfrm>
           <a:prstGeom prst="rect">
             <a:avLst/>
@@ -4839,29 +5077,139 @@
           </a:bodyPr>
           <a:lstStyle/>
           <a:p>
-            <a:pPr algn="l"/>
-            <a:r>
-              <a:rPr sz="1200" b="0">
+            <a:pPr algn="l">
+              <a:spcAft>
+                <a:spcPts val="200"/>
+              </a:spcAft>
+            </a:pPr>
+            <a:r>
+              <a:rPr sz="1150" b="0">
+                <a:solidFill>
+                  <a:srgbClr val="1C3E6D"/>
+                </a:solidFill>
+                <a:latin typeface="Manrope"/>
+              </a:rPr>
+              <a:t>Президенты стран Центральной Азии выразили готовность к сотрудничеству в рамках Проектного офиса для Центральной Азии по изменению климата и зелёной энергетике.</a:t>
+            </a:r>
+          </a:p>
+          <a:p>
+            <a:pPr algn="l">
+              <a:spcAft>
+                <a:spcPts val="200"/>
+              </a:spcAft>
+            </a:pPr>
+            <a:r>
+              <a:rPr sz="1150" b="0">
                 <a:solidFill>
                   <a:srgbClr val="404040"/>
                 </a:solidFill>
                 <a:latin typeface="Manrope"/>
               </a:rPr>
-              <a:t>регистрация в МФЦА</a:t>
-            </a:r>
-          </a:p>
-        </p:txBody>
-      </p:sp>
-      <p:sp>
-        <p:nvSpPr>
-          <p:cNvPr id="61" name="TextBox 60"/>
+              <a:t>Региональный экологический саммит, Астана, 22–24 апреля 2026 года</a:t>
+            </a:r>
+          </a:p>
+        </p:txBody>
+      </p:sp>
+      <p:sp>
+        <p:nvSpPr>
+          <p:cNvPr id="67" name="Rounded Rectangle 66"/>
+          <p:cNvSpPr/>
+          <p:nvPr/>
+        </p:nvSpPr>
+        <p:spPr>
+          <a:xfrm>
+            <a:off x="6263999" y="3851999"/>
+            <a:ext cx="5652000" cy="1134000"/>
+          </a:xfrm>
+          <a:prstGeom prst="roundRect">
+            <a:avLst>
+              <a:gd name="adj" fmla="val 8000"/>
+            </a:avLst>
+          </a:prstGeom>
+          <a:solidFill>
+            <a:srgbClr val="F1F4F9"/>
+          </a:solidFill>
+          <a:ln>
+            <a:noFill/>
+          </a:ln>
+          <a:effectLst/>
+        </p:spPr>
+        <p:style>
+          <a:lnRef idx="1">
+            <a:schemeClr val="accent1"/>
+          </a:lnRef>
+          <a:fillRef idx="3">
+            <a:schemeClr val="accent1"/>
+          </a:fillRef>
+          <a:effectRef idx="2">
+            <a:schemeClr val="accent1"/>
+          </a:effectRef>
+          <a:fontRef idx="minor">
+            <a:schemeClr val="lt1"/>
+          </a:fontRef>
+        </p:style>
+        <p:txBody>
+          <a:bodyPr rtlCol="0" anchor="ctr"/>
+          <a:lstStyle/>
+          <a:p>
+            <a:pPr algn="ctr"/>
+          </a:p>
+        </p:txBody>
+      </p:sp>
+      <p:sp>
+        <p:nvSpPr>
+          <p:cNvPr id="68" name="Rectangle 67"/>
+          <p:cNvSpPr/>
+          <p:nvPr/>
+        </p:nvSpPr>
+        <p:spPr>
+          <a:xfrm>
+            <a:off x="6263999" y="3851999"/>
+            <a:ext cx="43200" cy="1134000"/>
+          </a:xfrm>
+          <a:prstGeom prst="rect">
+            <a:avLst/>
+          </a:prstGeom>
+          <a:solidFill>
+            <a:srgbClr val="1C3E6D"/>
+          </a:solidFill>
+          <a:ln>
+            <a:noFill/>
+          </a:ln>
+          <a:effectLst/>
+        </p:spPr>
+        <p:style>
+          <a:lnRef idx="1">
+            <a:schemeClr val="accent1"/>
+          </a:lnRef>
+          <a:fillRef idx="3">
+            <a:schemeClr val="accent1"/>
+          </a:fillRef>
+          <a:effectRef idx="2">
+            <a:schemeClr val="accent1"/>
+          </a:effectRef>
+          <a:fontRef idx="minor">
+            <a:schemeClr val="lt1"/>
+          </a:fontRef>
+        </p:style>
+        <p:txBody>
+          <a:bodyPr rtlCol="0" anchor="ctr"/>
+          <a:lstStyle/>
+          <a:p>
+            <a:pPr algn="ctr"/>
+          </a:p>
+        </p:txBody>
+      </p:sp>
+      <p:sp>
+        <p:nvSpPr>
+          <p:cNvPr id="69" name="TextBox 68"/>
           <p:cNvSpPr txBox="1"/>
           <p:nvPr/>
         </p:nvSpPr>
         <p:spPr>
           <a:xfrm>
-            <a:off x="9504000" y="4536000"/>
-            <a:ext cx="2232000" cy="396000"/>
+            <a:off x="6426000" y="3923999"/>
+            <a:ext cx="5400000" cy="251999"/>
           </a:xfrm>
           <a:prstGeom prst="rect">
             <a:avLst/>
@@ -4876,27 +5224,27 @@
           <a:p>
             <a:pPr algn="l"/>
             <a:r>
-              <a:rPr sz="2200" b="1">
-                <a:solidFill>
-                  <a:srgbClr val="156082"/>
-                </a:solidFill>
-                <a:latin typeface="Manrope"/>
-              </a:rPr>
-              <a:t>2025</a:t>
-            </a:r>
-          </a:p>
-        </p:txBody>
-      </p:sp>
-      <p:sp>
-        <p:nvSpPr>
-          <p:cNvPr id="62" name="TextBox 61"/>
+              <a:rPr sz="1150" b="1">
+                <a:solidFill>
+                  <a:srgbClr val="1C3E6D"/>
+                </a:solidFill>
+                <a:latin typeface="Manrope"/>
+              </a:rPr>
+              <a:t>Президент Республики Казахстан о «Таза Қазақстан»</a:t>
+            </a:r>
+          </a:p>
+        </p:txBody>
+      </p:sp>
+      <p:sp>
+        <p:nvSpPr>
+          <p:cNvPr id="70" name="TextBox 69"/>
           <p:cNvSpPr txBox="1"/>
           <p:nvPr/>
         </p:nvSpPr>
         <p:spPr>
           <a:xfrm>
-            <a:off x="9504000" y="4932000"/>
-            <a:ext cx="2232000" cy="468000"/>
+            <a:off x="6426000" y="4157999"/>
+            <a:ext cx="5400000" cy="774000"/>
           </a:xfrm>
           <a:prstGeom prst="rect">
             <a:avLst/>
@@ -4909,15 +5257,215 @@
           </a:bodyPr>
           <a:lstStyle/>
           <a:p>
+            <a:pPr algn="l">
+              <a:spcAft>
+                <a:spcPts val="200"/>
+              </a:spcAft>
+            </a:pPr>
+            <a:r>
+              <a:rPr sz="1150" b="0">
+                <a:solidFill>
+                  <a:srgbClr val="1C3E6D"/>
+                </a:solidFill>
+                <a:latin typeface="Manrope"/>
+              </a:rPr>
+              <a:t>«Важно наполнить инициативу «Таза Қазақстан» качественно новым содержанием, свежими идеями и креативными проектами.»</a:t>
+            </a:r>
+          </a:p>
+          <a:p>
+            <a:pPr algn="l">
+              <a:spcAft>
+                <a:spcPts val="200"/>
+              </a:spcAft>
+            </a:pPr>
+            <a:r>
+              <a:rPr sz="1150" b="0">
+                <a:solidFill>
+                  <a:srgbClr val="404040"/>
+                </a:solidFill>
+                <a:latin typeface="Manrope"/>
+              </a:rPr>
+              <a:t>Первая сессия Қазақстан Халық Кеңесі, 24 сентября 2026 года</a:t>
+            </a:r>
+          </a:p>
+        </p:txBody>
+      </p:sp>
+      <p:sp>
+        <p:nvSpPr>
+          <p:cNvPr id="71" name="Rounded Rectangle 70"/>
+          <p:cNvSpPr/>
+          <p:nvPr/>
+        </p:nvSpPr>
+        <p:spPr>
+          <a:xfrm>
+            <a:off x="6263999" y="5058000"/>
+            <a:ext cx="5652000" cy="1152000"/>
+          </a:xfrm>
+          <a:prstGeom prst="roundRect">
+            <a:avLst>
+              <a:gd name="adj" fmla="val 8000"/>
+            </a:avLst>
+          </a:prstGeom>
+          <a:solidFill>
+            <a:srgbClr val="FBF6E8"/>
+          </a:solidFill>
+          <a:ln>
+            <a:noFill/>
+          </a:ln>
+          <a:effectLst/>
+        </p:spPr>
+        <p:style>
+          <a:lnRef idx="1">
+            <a:schemeClr val="accent1"/>
+          </a:lnRef>
+          <a:fillRef idx="3">
+            <a:schemeClr val="accent1"/>
+          </a:fillRef>
+          <a:effectRef idx="2">
+            <a:schemeClr val="accent1"/>
+          </a:effectRef>
+          <a:fontRef idx="minor">
+            <a:schemeClr val="lt1"/>
+          </a:fontRef>
+        </p:style>
+        <p:txBody>
+          <a:bodyPr rtlCol="0" anchor="ctr"/>
+          <a:lstStyle/>
+          <a:p>
+            <a:pPr algn="ctr"/>
+          </a:p>
+        </p:txBody>
+      </p:sp>
+      <p:sp>
+        <p:nvSpPr>
+          <p:cNvPr id="72" name="Rectangle 71"/>
+          <p:cNvSpPr/>
+          <p:nvPr/>
+        </p:nvSpPr>
+        <p:spPr>
+          <a:xfrm>
+            <a:off x="6263999" y="5058000"/>
+            <a:ext cx="43200" cy="1152000"/>
+          </a:xfrm>
+          <a:prstGeom prst="rect">
+            <a:avLst/>
+          </a:prstGeom>
+          <a:solidFill>
+            <a:srgbClr val="C99A1E"/>
+          </a:solidFill>
+          <a:ln>
+            <a:noFill/>
+          </a:ln>
+          <a:effectLst/>
+        </p:spPr>
+        <p:style>
+          <a:lnRef idx="1">
+            <a:schemeClr val="accent1"/>
+          </a:lnRef>
+          <a:fillRef idx="3">
+            <a:schemeClr val="accent1"/>
+          </a:fillRef>
+          <a:effectRef idx="2">
+            <a:schemeClr val="accent1"/>
+          </a:effectRef>
+          <a:fontRef idx="minor">
+            <a:schemeClr val="lt1"/>
+          </a:fontRef>
+        </p:style>
+        <p:txBody>
+          <a:bodyPr rtlCol="0" anchor="ctr"/>
+          <a:lstStyle/>
+          <a:p>
+            <a:pPr algn="ctr"/>
+          </a:p>
+        </p:txBody>
+      </p:sp>
+      <p:sp>
+        <p:nvSpPr>
+          <p:cNvPr id="73" name="TextBox 72"/>
+          <p:cNvSpPr txBox="1"/>
+          <p:nvPr/>
+        </p:nvSpPr>
+        <p:spPr>
+          <a:xfrm>
+            <a:off x="6426000" y="5130000"/>
+            <a:ext cx="5400000" cy="251999"/>
+          </a:xfrm>
+          <a:prstGeom prst="rect">
+            <a:avLst/>
+          </a:prstGeom>
+          <a:noFill/>
+        </p:spPr>
+        <p:txBody>
+          <a:bodyPr wrap="square" anchor="t" lIns="36000" rIns="36000" tIns="18000" bIns="18000">
+            <a:spAutoFit/>
+          </a:bodyPr>
+          <a:lstStyle/>
+          <a:p>
             <a:pPr algn="l"/>
             <a:r>
-              <a:rPr sz="1200" b="0">
+              <a:rPr sz="1150" b="1">
+                <a:solidFill>
+                  <a:srgbClr val="C99A1E"/>
+                </a:solidFill>
+                <a:latin typeface="Manrope"/>
+              </a:rPr>
+              <a:t>Проектный офис «Таза Қазақстан» на базе Фонда</a:t>
+            </a:r>
+          </a:p>
+        </p:txBody>
+      </p:sp>
+      <p:sp>
+        <p:nvSpPr>
+          <p:cNvPr id="74" name="TextBox 73"/>
+          <p:cNvSpPr txBox="1"/>
+          <p:nvPr/>
+        </p:nvSpPr>
+        <p:spPr>
+          <a:xfrm>
+            <a:off x="6426000" y="5364000"/>
+            <a:ext cx="5400000" cy="792000"/>
+          </a:xfrm>
+          <a:prstGeom prst="rect">
+            <a:avLst/>
+          </a:prstGeom>
+          <a:noFill/>
+        </p:spPr>
+        <p:txBody>
+          <a:bodyPr wrap="square" anchor="t" lIns="36000" rIns="36000" tIns="18000" bIns="18000">
+            <a:spAutoFit/>
+          </a:bodyPr>
+          <a:lstStyle/>
+          <a:p>
+            <a:pPr algn="l">
+              <a:spcAft>
+                <a:spcPts val="200"/>
+              </a:spcAft>
+            </a:pPr>
+            <a:r>
+              <a:rPr sz="1150" b="0">
+                <a:solidFill>
+                  <a:srgbClr val="1C3E6D"/>
+                </a:solidFill>
+                <a:latin typeface="Manrope"/>
+              </a:rPr>
+              <a:t>Вице-Президент Республики Казахстан согласовал размещение Проектного офиса «Таза Қазақстан» на базе Фонда по предложению МЭПР; Министерству поручено продолжить работу.</a:t>
+            </a:r>
+          </a:p>
+          <a:p>
+            <a:pPr algn="l">
+              <a:spcAft>
+                <a:spcPts val="200"/>
+              </a:spcAft>
+            </a:pPr>
+            <a:r>
+              <a:rPr sz="1150" b="0">
                 <a:solidFill>
                   <a:srgbClr val="404040"/>
                 </a:solidFill>
                 <a:latin typeface="Manrope"/>
               </a:rPr>
-              <a:t>положительное аудиторское заключение</a:t>
+              <a:t>Резолюция от 19 октября 2026 года</a:t>
             </a:r>
           </a:p>
         </p:txBody>
@@ -8321,7 +8869,7 @@
                 </a:solidFill>
                 <a:latin typeface="Manrope"/>
               </a:rPr>
-              <a:t>120</a:t>
+              <a:t>127+</a:t>
             </a:r>
           </a:p>
         </p:txBody>
@@ -8391,7 +8939,7 @@
                 </a:solidFill>
                 <a:latin typeface="Manrope"/>
               </a:rPr>
-              <a:t>июнь – сентябрь</a:t>
+              <a:t>июнь – октябрь</a:t>
             </a:r>
           </a:p>
         </p:txBody>
@@ -8516,7 +9064,7 @@
                 </a:solidFill>
                 <a:latin typeface="Manrope"/>
               </a:rPr>
-              <a:t>130</a:t>
+              <a:t>130+</a:t>
             </a:r>
           </a:p>
         </p:txBody>

--- a/CACF/_документы/Презентация ЦАКФ – о Фонде.pptx
+++ b/CACF/_документы/Презентация ЦАКФ – о Фонде.pptx
@@ -3576,7 +3576,7 @@
             <a:extLst>
               <a:ext uri="{BEBA8EAE-BF5A-486C-A8C5-ECC9F3942E4B}">
                 <a14:imgProps xmlns:a14="http://schemas.microsoft.com/office/drawing/2010/main">
-                  <a14:imgLayer r:embed="rId5">
+                  <a14:imgLayer r:embed="rId2">
                     <a14:imgEffect>
                       <a14:brightnessContrast bright="40000"/>
                     </a14:imgEffect>
@@ -4092,7 +4092,7 @@
         <p:spPr>
           <a:xfrm>
             <a:off x="827999" y="2484000"/>
-            <a:ext cx="5148000" cy="936000"/>
+            <a:ext cx="5148000" cy="635635"/>
           </a:xfrm>
           <a:prstGeom prst="rect">
             <a:avLst/>
@@ -4122,7 +4122,52 @@
                 </a:solidFill>
                 <a:latin typeface="Manrope"/>
               </a:rPr>
-              <a:t>Проектного офиса для Центральной Азии по изменению климата и зелёной энергетике и Проектного офиса «Таза Қазақстан».</a:t>
+              <a:t>Проектного офиса для Центральной Азии по изменению климата и зелёной энергетике и </a:t>
+            </a:r>
+            <a:endParaRPr sz="1300" b="0">
+              <a:solidFill>
+                <a:srgbClr val="404040"/>
+              </a:solidFill>
+              <a:latin typeface="Manrope"/>
+            </a:endParaRPr>
+          </a:p>
+          <a:p>
+            <a:pPr algn="l"/>
+            <a:r>
+              <a:rPr sz="1300" b="0">
+                <a:solidFill>
+                  <a:srgbClr val="404040"/>
+                </a:solidFill>
+                <a:latin typeface="Manrope"/>
+              </a:rPr>
+              <a:t>Проектного офиса «Таза </a:t>
+            </a:r>
+            <a:r>
+              <a:rPr lang="ru-RU" sz="1300" b="0">
+                <a:solidFill>
+                  <a:srgbClr val="404040"/>
+                </a:solidFill>
+                <a:latin typeface="Manrope"/>
+              </a:rPr>
+              <a:t> </a:t>
+            </a:r>
+            <a:r>
+              <a:rPr lang="" sz="1300" b="0">
+                <a:solidFill>
+                  <a:srgbClr val="404040"/>
+                </a:solidFill>
+                <a:latin typeface="Manrope"/>
+              </a:rPr>
+              <a:t>Қ</a:t>
+            </a:r>
+            <a:r>
+              <a:rPr sz="1300" b="0">
+                <a:solidFill>
+                  <a:srgbClr val="404040"/>
+                </a:solidFill>
+                <a:latin typeface="Manrope"/>
+              </a:rPr>
+              <a:t>азақстан».</a:t>
             </a:r>
             <a:endParaRPr sz="1300" b="0">
               <a:solidFill>
@@ -5403,7 +5448,7 @@
             <a:extLst>
               <a:ext uri="{BEBA8EAE-BF5A-486C-A8C5-ECC9F3942E4B}">
                 <a14:imgProps xmlns:a14="http://schemas.microsoft.com/office/drawing/2010/main">
-                  <a14:imgLayer r:embed="rId5">
+                  <a14:imgLayer r:embed="rId2">
                     <a14:imgEffect>
                       <a14:brightnessContrast bright="40000"/>
                     </a14:imgEffect>
@@ -7119,7 +7164,7 @@
             <a:extLst>
               <a:ext uri="{BEBA8EAE-BF5A-486C-A8C5-ECC9F3942E4B}">
                 <a14:imgProps xmlns:a14="http://schemas.microsoft.com/office/drawing/2010/main">
-                  <a14:imgLayer r:embed="rId5">
+                  <a14:imgLayer r:embed="rId2">
                     <a14:imgEffect>
                       <a14:brightnessContrast bright="40000"/>
                     </a14:imgEffect>
@@ -9306,7 +9351,7 @@
             <a:extLst>
               <a:ext uri="{BEBA8EAE-BF5A-486C-A8C5-ECC9F3942E4B}">
                 <a14:imgProps xmlns:a14="http://schemas.microsoft.com/office/drawing/2010/main">
-                  <a14:imgLayer r:embed="rId5">
+                  <a14:imgLayer r:embed="rId2">
                     <a14:imgEffect>
                       <a14:brightnessContrast bright="40000"/>
                     </a14:imgEffect>
@@ -10373,7 +10418,7 @@
           <a:noFill/>
         </p:spPr>
         <p:txBody>
-          <a:bodyPr wrap="square" anchor="ctr" lIns="36000" rIns="36000" tIns="18000" bIns="18000">
+          <a:bodyPr wrap="square" lIns="36000" tIns="18000" rIns="36000" bIns="18000" anchor="ctr">
             <a:spAutoFit/>
           </a:bodyPr>
           <a:lstStyle/>
@@ -10388,6 +10433,12 @@
               </a:rPr>
               <a:t>01</a:t>
             </a:r>
+            <a:endParaRPr sz="1300" b="1">
+              <a:solidFill>
+                <a:srgbClr val="FFFFFF"/>
+              </a:solidFill>
+              <a:latin typeface="Manrope"/>
+            </a:endParaRPr>
           </a:p>
         </p:txBody>
       </p:sp>
@@ -10408,7 +10459,7 @@
           <a:noFill/>
         </p:spPr>
         <p:txBody>
-          <a:bodyPr wrap="square" anchor="ctr" lIns="36000" rIns="36000" tIns="18000" bIns="18000">
+          <a:bodyPr wrap="square" lIns="36000" tIns="18000" rIns="36000" bIns="18000" anchor="ctr">
             <a:spAutoFit/>
           </a:bodyPr>
           <a:lstStyle/>
@@ -10423,6 +10474,12 @@
               </a:rPr>
               <a:t>Региональные климатические действия, политика и сотрудничество стран Центральной Азии</a:t>
             </a:r>
+            <a:endParaRPr sz="1250" b="0">
+              <a:solidFill>
+                <a:srgbClr val="404040"/>
+              </a:solidFill>
+              <a:latin typeface="Manrope"/>
+            </a:endParaRPr>
           </a:p>
         </p:txBody>
       </p:sp>
@@ -10489,7 +10546,7 @@
           <a:noFill/>
         </p:spPr>
         <p:txBody>
-          <a:bodyPr wrap="square" anchor="ctr" lIns="36000" rIns="36000" tIns="18000" bIns="18000">
+          <a:bodyPr wrap="square" lIns="36000" tIns="18000" rIns="36000" bIns="18000" anchor="ctr">
             <a:spAutoFit/>
           </a:bodyPr>
           <a:lstStyle/>
@@ -10504,6 +10561,12 @@
               </a:rPr>
               <a:t>02</a:t>
             </a:r>
+            <a:endParaRPr sz="1300" b="1">
+              <a:solidFill>
+                <a:srgbClr val="FFFFFF"/>
+              </a:solidFill>
+              <a:latin typeface="Manrope"/>
+            </a:endParaRPr>
           </a:p>
         </p:txBody>
       </p:sp>
@@ -10524,7 +10587,7 @@
           <a:noFill/>
         </p:spPr>
         <p:txBody>
-          <a:bodyPr wrap="square" anchor="ctr" lIns="36000" rIns="36000" tIns="18000" bIns="18000">
+          <a:bodyPr wrap="square" lIns="36000" tIns="18000" rIns="36000" bIns="18000" anchor="ctr">
             <a:spAutoFit/>
           </a:bodyPr>
           <a:lstStyle/>
@@ -10539,6 +10602,12 @@
               </a:rPr>
               <a:t>Исследования, инновации, экологические данные и аналитика</a:t>
             </a:r>
+            <a:endParaRPr sz="1250" b="0">
+              <a:solidFill>
+                <a:srgbClr val="404040"/>
+              </a:solidFill>
+              <a:latin typeface="Manrope"/>
+            </a:endParaRPr>
           </a:p>
         </p:txBody>
       </p:sp>
@@ -10605,7 +10674,7 @@
           <a:noFill/>
         </p:spPr>
         <p:txBody>
-          <a:bodyPr wrap="square" anchor="ctr" lIns="36000" rIns="36000" tIns="18000" bIns="18000">
+          <a:bodyPr wrap="square" lIns="36000" tIns="18000" rIns="36000" bIns="18000" anchor="ctr">
             <a:spAutoFit/>
           </a:bodyPr>
           <a:lstStyle/>
@@ -10620,6 +10689,12 @@
               </a:rPr>
               <a:t>03</a:t>
             </a:r>
+            <a:endParaRPr sz="1300" b="1">
+              <a:solidFill>
+                <a:srgbClr val="FFFFFF"/>
+              </a:solidFill>
+              <a:latin typeface="Manrope"/>
+            </a:endParaRPr>
           </a:p>
         </p:txBody>
       </p:sp>
@@ -10640,7 +10715,7 @@
           <a:noFill/>
         </p:spPr>
         <p:txBody>
-          <a:bodyPr wrap="square" anchor="ctr" lIns="36000" rIns="36000" tIns="18000" bIns="18000">
+          <a:bodyPr wrap="square" lIns="36000" tIns="18000" rIns="36000" bIns="18000" anchor="ctr">
             <a:spAutoFit/>
           </a:bodyPr>
           <a:lstStyle/>
@@ -10655,6 +10730,12 @@
               </a:rPr>
               <a:t>Партнёрства, климатическое и грантовое финансирование, углеродные рынки</a:t>
             </a:r>
+            <a:endParaRPr sz="1250" b="0">
+              <a:solidFill>
+                <a:srgbClr val="404040"/>
+              </a:solidFill>
+              <a:latin typeface="Manrope"/>
+            </a:endParaRPr>
           </a:p>
         </p:txBody>
       </p:sp>
@@ -10721,7 +10802,7 @@
           <a:noFill/>
         </p:spPr>
         <p:txBody>
-          <a:bodyPr wrap="square" anchor="ctr" lIns="36000" rIns="36000" tIns="18000" bIns="18000">
+          <a:bodyPr wrap="square" lIns="36000" tIns="18000" rIns="36000" bIns="18000" anchor="ctr">
             <a:spAutoFit/>
           </a:bodyPr>
           <a:lstStyle/>
@@ -10736,6 +10817,12 @@
               </a:rPr>
               <a:t>04</a:t>
             </a:r>
+            <a:endParaRPr sz="1300" b="1">
+              <a:solidFill>
+                <a:srgbClr val="FFFFFF"/>
+              </a:solidFill>
+              <a:latin typeface="Manrope"/>
+            </a:endParaRPr>
           </a:p>
         </p:txBody>
       </p:sp>
@@ -10756,7 +10843,7 @@
           <a:noFill/>
         </p:spPr>
         <p:txBody>
-          <a:bodyPr wrap="square" anchor="ctr" lIns="36000" rIns="36000" tIns="18000" bIns="18000">
+          <a:bodyPr wrap="square" lIns="36000" tIns="18000" rIns="36000" bIns="18000" anchor="ctr">
             <a:spAutoFit/>
           </a:bodyPr>
           <a:lstStyle/>
@@ -10771,6 +10858,12 @@
               </a:rPr>
               <a:t>ESG и оценка климатических и экологических рисков</a:t>
             </a:r>
+            <a:endParaRPr sz="1250" b="0">
+              <a:solidFill>
+                <a:srgbClr val="404040"/>
+              </a:solidFill>
+              <a:latin typeface="Manrope"/>
+            </a:endParaRPr>
           </a:p>
         </p:txBody>
       </p:sp>
@@ -10837,7 +10930,7 @@
           <a:noFill/>
         </p:spPr>
         <p:txBody>
-          <a:bodyPr wrap="square" anchor="ctr" lIns="36000" rIns="36000" tIns="18000" bIns="18000">
+          <a:bodyPr wrap="square" lIns="36000" tIns="18000" rIns="36000" bIns="18000" anchor="ctr">
             <a:spAutoFit/>
           </a:bodyPr>
           <a:lstStyle/>
@@ -10852,6 +10945,12 @@
               </a:rPr>
               <a:t>05</a:t>
             </a:r>
+            <a:endParaRPr sz="1300" b="1">
+              <a:solidFill>
+                <a:srgbClr val="FFFFFF"/>
+              </a:solidFill>
+              <a:latin typeface="Manrope"/>
+            </a:endParaRPr>
           </a:p>
         </p:txBody>
       </p:sp>
@@ -10872,7 +10971,7 @@
           <a:noFill/>
         </p:spPr>
         <p:txBody>
-          <a:bodyPr wrap="square" anchor="ctr" lIns="36000" rIns="36000" tIns="18000" bIns="18000">
+          <a:bodyPr wrap="square" lIns="36000" tIns="18000" rIns="36000" bIns="18000" anchor="ctr">
             <a:spAutoFit/>
           </a:bodyPr>
           <a:lstStyle/>
@@ -10887,6 +10986,12 @@
               </a:rPr>
               <a:t>Экспертное сопровождение, «Зелёный Think Tank»</a:t>
             </a:r>
+            <a:endParaRPr sz="1250" b="0">
+              <a:solidFill>
+                <a:srgbClr val="404040"/>
+              </a:solidFill>
+              <a:latin typeface="Manrope"/>
+            </a:endParaRPr>
           </a:p>
         </p:txBody>
       </p:sp>
@@ -10953,7 +11058,7 @@
           <a:noFill/>
         </p:spPr>
         <p:txBody>
-          <a:bodyPr wrap="square" anchor="ctr" lIns="36000" rIns="36000" tIns="18000" bIns="18000">
+          <a:bodyPr wrap="square" lIns="36000" tIns="18000" rIns="36000" bIns="18000" anchor="ctr">
             <a:spAutoFit/>
           </a:bodyPr>
           <a:lstStyle/>
@@ -10968,6 +11073,12 @@
               </a:rPr>
               <a:t>06</a:t>
             </a:r>
+            <a:endParaRPr sz="1300" b="1">
+              <a:solidFill>
+                <a:srgbClr val="FFFFFF"/>
+              </a:solidFill>
+              <a:latin typeface="Manrope"/>
+            </a:endParaRPr>
           </a:p>
         </p:txBody>
       </p:sp>
@@ -10988,7 +11099,7 @@
           <a:noFill/>
         </p:spPr>
         <p:txBody>
-          <a:bodyPr wrap="square" anchor="ctr" lIns="36000" rIns="36000" tIns="18000" bIns="18000">
+          <a:bodyPr wrap="square" lIns="36000" tIns="18000" rIns="36000" bIns="18000" anchor="ctr">
             <a:spAutoFit/>
           </a:bodyPr>
           <a:lstStyle/>
@@ -11003,6 +11114,12 @@
               </a:rPr>
               <a:t>Обучение, просвещение, вовлечение детей и молодёжи</a:t>
             </a:r>
+            <a:endParaRPr sz="1250" b="0">
+              <a:solidFill>
+                <a:srgbClr val="404040"/>
+              </a:solidFill>
+              <a:latin typeface="Manrope"/>
+            </a:endParaRPr>
           </a:p>
         </p:txBody>
       </p:sp>
@@ -11069,7 +11186,7 @@
           <a:noFill/>
         </p:spPr>
         <p:txBody>
-          <a:bodyPr wrap="square" anchor="ctr" lIns="36000" rIns="36000" tIns="18000" bIns="18000">
+          <a:bodyPr wrap="square" lIns="36000" tIns="18000" rIns="36000" bIns="18000" anchor="ctr">
             <a:spAutoFit/>
           </a:bodyPr>
           <a:lstStyle/>
@@ -11084,6 +11201,12 @@
               </a:rPr>
               <a:t>07</a:t>
             </a:r>
+            <a:endParaRPr sz="1300" b="1">
+              <a:solidFill>
+                <a:srgbClr val="FFFFFF"/>
+              </a:solidFill>
+              <a:latin typeface="Manrope"/>
+            </a:endParaRPr>
           </a:p>
         </p:txBody>
       </p:sp>
@@ -11104,7 +11227,7 @@
           <a:noFill/>
         </p:spPr>
         <p:txBody>
-          <a:bodyPr wrap="square" anchor="ctr" lIns="36000" rIns="36000" tIns="18000" bIns="18000">
+          <a:bodyPr wrap="square" lIns="36000" tIns="18000" rIns="36000" bIns="18000" anchor="ctr">
             <a:spAutoFit/>
           </a:bodyPr>
           <a:lstStyle/>
@@ -11119,6 +11242,12 @@
               </a:rPr>
               <a:t>«Таза Қазақстан», региональные проекты и саммиты</a:t>
             </a:r>
+            <a:endParaRPr sz="1250" b="0">
+              <a:solidFill>
+                <a:srgbClr val="404040"/>
+              </a:solidFill>
+              <a:latin typeface="Manrope"/>
+            </a:endParaRPr>
           </a:p>
         </p:txBody>
       </p:sp>
@@ -11185,7 +11314,7 @@
           <a:noFill/>
         </p:spPr>
         <p:txBody>
-          <a:bodyPr wrap="square" anchor="ctr" lIns="36000" rIns="36000" tIns="18000" bIns="18000">
+          <a:bodyPr wrap="square" lIns="36000" tIns="18000" rIns="36000" bIns="18000" anchor="ctr">
             <a:spAutoFit/>
           </a:bodyPr>
           <a:lstStyle/>
@@ -11200,6 +11329,12 @@
               </a:rPr>
               <a:t>08</a:t>
             </a:r>
+            <a:endParaRPr sz="1300" b="1">
+              <a:solidFill>
+                <a:srgbClr val="FFFFFF"/>
+              </a:solidFill>
+              <a:latin typeface="Manrope"/>
+            </a:endParaRPr>
           </a:p>
         </p:txBody>
       </p:sp>
@@ -11220,7 +11355,7 @@
           <a:noFill/>
         </p:spPr>
         <p:txBody>
-          <a:bodyPr wrap="square" anchor="ctr" lIns="36000" rIns="36000" tIns="18000" bIns="18000">
+          <a:bodyPr wrap="square" lIns="36000" tIns="18000" rIns="36000" bIns="18000" anchor="ctr">
             <a:spAutoFit/>
           </a:bodyPr>
           <a:lstStyle/>
@@ -11235,6 +11370,12 @@
               </a:rPr>
               <a:t>Охрана окружающей среды и цифровые решения</a:t>
             </a:r>
+            <a:endParaRPr sz="1250" b="0">
+              <a:solidFill>
+                <a:srgbClr val="404040"/>
+              </a:solidFill>
+              <a:latin typeface="Manrope"/>
+            </a:endParaRPr>
           </a:p>
         </p:txBody>
       </p:sp>
@@ -11269,7 +11410,7 @@
             <a:extLst>
               <a:ext uri="{BEBA8EAE-BF5A-486C-A8C5-ECC9F3942E4B}">
                 <a14:imgProps xmlns:a14="http://schemas.microsoft.com/office/drawing/2010/main">
-                  <a14:imgLayer r:embed="rId6">
+                  <a14:imgLayer r:embed="rId2">
                     <a14:imgEffect>
                       <a14:brightnessContrast bright="40000"/>
                     </a14:imgEffect>
@@ -12584,7 +12725,7 @@
             <a:extLst>
               <a:ext uri="{BEBA8EAE-BF5A-486C-A8C5-ECC9F3942E4B}">
                 <a14:imgProps xmlns:a14="http://schemas.microsoft.com/office/drawing/2010/main">
-                  <a14:imgLayer r:embed="rId5">
+                  <a14:imgLayer r:embed="rId2">
                     <a14:imgEffect>
                       <a14:brightnessContrast bright="40000"/>
                     </a14:imgEffect>
